--- a/web/public/pitch/SVI-Pitch-Deck-PreSeed-2026-09.pptx
+++ b/web/public/pitch/SVI-Pitch-Deck-PreSeed-2026-09.pptx
@@ -7734,109 +7734,32 @@
           </a:p>
         </p:txBody>
       </p:sp>
-      <p:sp>
-        <p:nvSpPr>
-          <p:cNvPr id="4" name="Shape 2"/>
-          <p:cNvSpPr/>
-          <p:nvPr/>
-        </p:nvSpPr>
+      <p:pic>
+        <p:nvPicPr>
+          <p:cNvPr id="4" name="Image 0" descr="/home/dovanlong/blockid.au/.claude/worktrees/agent-a699c403bb3276ddd/web/public/video-assets/10-investor-dossier.png">    </p:cNvPr>
+          <p:cNvPicPr>
+            <a:picLocks noChangeAspect="1"/>
+          </p:cNvPicPr>
+          <p:nvPr/>
+        </p:nvPicPr>
+        <p:blipFill>
+          <a:blip r:embed="rId1"/>
+          <a:srcRect l="0" r="0" t="0" b="0"/>
+          <a:stretch/>
+        </p:blipFill>
         <p:spPr>
           <a:xfrm>
             <a:off x="457200" y="1691640"/>
             <a:ext cx="7040880" cy="3794760"/>
           </a:xfrm>
-          <a:prstGeom prst="roundRect">
-            <a:avLst>
-              <a:gd name="adj" fmla="val 2410"/>
-            </a:avLst>
-          </a:prstGeom>
-          <a:solidFill>
-            <a:srgbClr val="F1F5F9"/>
-          </a:solidFill>
-          <a:ln w="12700">
-            <a:solidFill>
-              <a:srgbClr val="94A3B8"/>
-            </a:solidFill>
-            <a:prstDash val="dash"/>
-          </a:ln>
-        </p:spPr>
-      </p:sp>
-      <p:sp>
-        <p:nvSpPr>
-          <p:cNvPr id="5" name="Text 3"/>
-          <p:cNvSpPr/>
-          <p:nvPr/>
-        </p:nvSpPr>
-        <p:spPr>
-          <a:xfrm>
-            <a:off x="457200" y="1691640"/>
-            <a:ext cx="7040880" cy="3794760"/>
-          </a:xfrm>
-          <a:prstGeom prst="rect">
-            <a:avLst/>
-          </a:prstGeom>
-          <a:noFill/>
-          <a:ln/>
-        </p:spPr>
-        <p:txBody>
-          <a:bodyPr wrap="square" rtlCol="0" anchor="ctr"/>
-          <a:lstStyle/>
-          <a:p>
-            <a:pPr algn="ctr" indent="0" marL="0">
-              <a:buNone/>
-            </a:pPr>
-            <a:r>
-              <a:rPr lang="en-US" sz="1200" dirty="0">
-                <a:solidFill>
-                  <a:srgbClr val="64748B"/>
-                </a:solidFill>
-                <a:latin typeface="Arial" pitchFamily="34" charset="0"/>
-                <a:ea typeface="Arial" pitchFamily="34" charset="-122"/>
-                <a:cs typeface="Arial" pitchFamily="34" charset="-120"/>
-              </a:rPr>
-              <a:t>[screenshot placeholder]</a:t>
-            </a:r>
-            <a:endParaRPr lang="en-US" sz="1200" dirty="0"/>
-          </a:p>
-          <a:p>
-            <a:pPr algn="ctr" indent="0" marL="0">
-              <a:buNone/>
-            </a:pPr>
-            <a:r>
-              <a:rPr lang="en-US" sz="1200" dirty="0">
-                <a:solidFill>
-                  <a:srgbClr val="64748B"/>
-                </a:solidFill>
-                <a:latin typeface="Arial" pitchFamily="34" charset="0"/>
-                <a:ea typeface="Arial" pitchFamily="34" charset="-122"/>
-                <a:cs typeface="Arial" pitchFamily="34" charset="-120"/>
-              </a:rPr>
-              <a:t>public/video-assets/10-investor-dossier.png</a:t>
-            </a:r>
-            <a:endParaRPr lang="en-US" sz="1200" dirty="0"/>
-          </a:p>
-          <a:p>
-            <a:pPr algn="ctr" indent="0" marL="0">
-              <a:buNone/>
-            </a:pPr>
-            <a:r>
-              <a:rPr lang="en-US" sz="1200" dirty="0">
-                <a:solidFill>
-                  <a:srgbClr val="64748B"/>
-                </a:solidFill>
-                <a:latin typeface="Arial" pitchFamily="34" charset="0"/>
-                <a:ea typeface="Arial" pitchFamily="34" charset="-122"/>
-                <a:cs typeface="Arial" pitchFamily="34" charset="-120"/>
-              </a:rPr>
-              <a:t>run scripts/tour-capture.mjs on localhost:4001 (seeded evaluator)</a:t>
-            </a:r>
-            <a:endParaRPr lang="en-US" sz="1200" dirty="0"/>
-          </a:p>
-        </p:txBody>
-      </p:sp>
-      <p:sp>
-        <p:nvSpPr>
-          <p:cNvPr id="6" name="Text 4"/>
+          <a:prstGeom prst="rect">
+            <a:avLst/>
+          </a:prstGeom>
+        </p:spPr>
+      </p:pic>
+      <p:sp>
+        <p:nvSpPr>
+          <p:cNvPr id="5" name="Text 2"/>
           <p:cNvSpPr/>
           <p:nvPr/>
         </p:nvSpPr>
@@ -7875,7 +7798,7 @@
       </p:sp>
       <p:sp>
         <p:nvSpPr>
-          <p:cNvPr id="7" name="Text 5"/>
+          <p:cNvPr id="6" name="Text 3"/>
           <p:cNvSpPr/>
           <p:nvPr/>
         </p:nvSpPr>
@@ -7960,7 +7883,7 @@
       </p:sp>
       <p:sp>
         <p:nvSpPr>
-          <p:cNvPr id="9" name="Text 6"/>
+          <p:cNvPr id="8" name="Text 4"/>
           <p:cNvSpPr/>
           <p:nvPr/>
         </p:nvSpPr>
